--- a/Data Science Fall 2026/slides/out/DS_Ch14_Model_Evaluation_and_Selection.pptx
+++ b/Data Science Fall 2026/slides/out/DS_Ch14_Model_Evaluation_and_Selection.pptx
@@ -153,7 +153,7 @@
   <p:extLst>
     <p:ext uri="{521415D9-36F7-43E2-AB2F-B90AF26B5E84}">
       <p14:sectionLst xmlns:p14="http://schemas.microsoft.com/office/powerpoint/2010/main">
-        <p14:section name="Opening" id="{E5602C3C-777E-4323-80D9-FBC7CE8E0B8A}">
+        <p14:section name="Opening" id="{B0EDD5A0-2987-428B-8097-11196B79CB1C}">
           <p14:sldIdLst>
             <p14:sldId id="256"/>
             <p14:sldId id="257"/>
@@ -162,12 +162,12 @@
             <p14:sldId id="260"/>
           </p14:sldIdLst>
         </p14:section>
-        <p14:section name="14.1 Why This Chapter Is the Hinge of Part III" id="{AEA5EC3E-875F-4016-B117-9985A458DAC9}">
+        <p14:section name="14.1 Why This Chapter Is the Hinge of Part III" id="{25386144-AFDD-4028-AEFC-FCAF1EE9B240}">
           <p14:sldIdLst>
             <p14:sldId id="261"/>
           </p14:sldIdLst>
         </p14:section>
-        <p14:section name="14.2 The Confusion Matrix" id="{C1E8EC8A-418A-4198-8FD6-38352520866B}">
+        <p14:section name="14.2 The Confusion Matrix" id="{25C77A7E-A6AD-44FE-88F5-6226312BC871}">
           <p14:sldIdLst>
             <p14:sldId id="262"/>
             <p14:sldId id="263"/>
@@ -177,7 +177,7 @@
             <p14:sldId id="267"/>
           </p14:sldIdLst>
         </p14:section>
-        <p14:section name="14.3 Trading Precision Against Recall" id="{E1B40929-0380-42E7-8C32-E726DD32BF97}">
+        <p14:section name="14.3 Trading Precision Against Recall" id="{3403A749-4756-4ED1-BA85-F8E9733AD190}">
           <p14:sldIdLst>
             <p14:sldId id="268"/>
             <p14:sldId id="269"/>
@@ -186,13 +186,13 @@
             <p14:sldId id="272"/>
           </p14:sldIdLst>
         </p14:section>
-        <p14:section name="14.4 Choosing the Threshold from Costs" id="{16312ABE-0D7A-4CEB-A350-8B302B2DBD2B}">
+        <p14:section name="14.4 Choosing the Threshold from Costs" id="{51D752E6-1776-49ED-919C-CD677807DBF6}">
           <p14:sldIdLst>
             <p14:sldId id="273"/>
             <p14:sldId id="274"/>
           </p14:sldIdLst>
         </p14:section>
-        <p14:section name="14.5 Cross-Validation" id="{8FCFC49F-AD40-4F50-8ABF-1540DB6D5619}">
+        <p14:section name="14.5 Cross-Validation" id="{7F05C042-580D-4BED-A853-F676310BF531}">
           <p14:sldIdLst>
             <p14:sldId id="275"/>
             <p14:sldId id="276"/>
@@ -200,12 +200,12 @@
             <p14:sldId id="278"/>
           </p14:sldIdLst>
         </p14:section>
-        <p14:section name="Pitfalls" id="{2D13C5D7-7976-4231-820D-D8DF35B66006}">
+        <p14:section name="Pitfalls" id="{F4A0E142-FC96-4C7D-8F43-D06BF6BC091E}">
           <p14:sldIdLst>
             <p14:sldId id="279"/>
           </p14:sldIdLst>
         </p14:section>
-        <p14:section name="Four lenses" id="{60EDDD5A-7F80-4FE2-97A4-9BED016D511A}">
+        <p14:section name="Four lenses" id="{83E5659B-6A54-4C8A-AFC4-5F4820165688}">
           <p14:sldIdLst>
             <p14:sldId id="280"/>
             <p14:sldId id="281"/>
@@ -214,7 +214,7 @@
             <p14:sldId id="284"/>
           </p14:sldIdLst>
         </p14:section>
-        <p14:section name="Lab" id="{8F4E5620-2112-4E29-A786-D3BA65C18406}">
+        <p14:section name="Lab" id="{7016CE57-997A-4619-80E9-55EFC3ED1C88}">
           <p14:sldIdLst>
             <p14:sldId id="285"/>
             <p14:sldId id="286"/>
@@ -225,7 +225,7 @@
             <p14:sldId id="291"/>
           </p14:sldIdLst>
         </p14:section>
-        <p14:section name="Checkpoint" id="{6A947E74-5611-47CC-9D90-BBB8ED236715}">
+        <p14:section name="Checkpoint" id="{5FE25C6B-3B14-4E46-8634-E3E80990B741}">
           <p14:sldIdLst>
             <p14:sldId id="292"/>
             <p14:sldId id="293"/>
@@ -235,7 +235,7 @@
             <p14:sldId id="297"/>
           </p14:sldIdLst>
         </p14:section>
-        <p14:section name="Wrap-up" id="{FA69781D-3101-4498-996C-4CF1EE3692F2}">
+        <p14:section name="Wrap-up" id="{B1909454-26BD-43B3-A590-7FCAD179249B}">
           <p14:sldIdLst>
             <p14:sldId id="298"/>
             <p14:sldId id="299"/>
@@ -645,7 +645,7 @@
           <a:lstStyle/>
           <a:p>
             <a:r>
-              <a:t>Chapter 14: Model Evaluation and Selection. Part 3 — Machine Learning Core. Week 9: Evaluation. Handout pages 88–94.</a:t>
+              <a:t>Chapter 14: Model Evaluation and Selection. Part 3 — Machine Learning Core. Week 8: Classification; evaluation (revision). Handout pages 88–94.</a:t>
             </a:r>
           </a:p>
         </p:txBody>
@@ -1415,7 +1415,7 @@
           <a:lstStyle/>
           <a:p>
             <a:r>
-              <a:t>Place the chapter. Before you start: Chapter 6 (the base-rate arithmetic — precision is the posterior computed there), Chapter 11 (splits) and Chapter 13 (thresholds).</a:t>
+              <a:t>Place the chapter. Before you start: Chapter 6 (the base-rate arithmetic — precision is the posterior computed there), Chapter 11 (splits) and Chapter 13 (thresholds). Revision note: revises Machine Learning Fall 2026, Chapter 8 (Measuring Classifier Performance).</a:t>
             </a:r>
           </a:p>
         </p:txBody>
@@ -3515,7 +3515,7 @@
           <a:lstStyle/>
           <a:p>
             <a:r>
-              <a:t>Close. NEXT: Chapter 15 — Feature Engineering and Ensembles. READ: Handout Chapter 14, pages 88–94. THIS WEEK'S LAB: Evaluate honestly; cost-based threshold.</a:t>
+              <a:t>Close. NEXT: Chapter 15 — Feature Engineering and Ensembles. READ: Handout Chapter 14, pages 88–94. THIS WEEK'S LAB: Five classifiers; evaluate honestly.</a:t>
             </a:r>
           </a:p>
         </p:txBody>
@@ -7104,7 +7104,7 @@
                 </a:solidFill>
                 <a:latin typeface="Segoe UI"/>
               </a:rPr>
-              <a:t>CHAPTER 14  ·  WEEK 9</a:t>
+              <a:t>CHAPTER 14  ·  WEEK 8</a:t>
             </a:r>
           </a:p>
         </p:txBody>
@@ -7704,7 +7704,7 @@
               </a:rPr>
               <a:t>§14.2  ·  Handout p. 88     </a:t>
             </a:r>
-            <a:fld id="{BC787FEB-E45B-4877-A5E3-212D9344883F}" type="slidenum">
+            <a:fld id="{3BA71EF7-7A6B-43CA-AB3C-211C2EBDAFE3}" type="slidenum">
               <a:rPr lang="en-GB" sz="1000">
                 <a:solidFill>
                   <a:srgbClr val="8795A1"/>
@@ -8947,7 +8947,7 @@
               </a:rPr>
               <a:t>§14.2  ·  Handout p. 88     </a:t>
             </a:r>
-            <a:fld id="{F079379B-6298-4C18-90E7-310BA9E512CF}" type="slidenum">
+            <a:fld id="{DABA0A02-ED88-452F-ABF5-311EC0C5E381}" type="slidenum">
               <a:rPr lang="en-GB" sz="1000">
                 <a:solidFill>
                   <a:srgbClr val="8795A1"/>
@@ -9981,7 +9981,7 @@
               </a:rPr>
               <a:t>§14.2  ·  Handout p. 88     </a:t>
             </a:r>
-            <a:fld id="{924B8FFA-5B50-4145-8DE8-0AD669901112}" type="slidenum">
+            <a:fld id="{1DF0489A-04C2-4769-ADD4-76B0D8DED708}" type="slidenum">
               <a:rPr lang="en-GB" sz="1000">
                 <a:solidFill>
                   <a:srgbClr val="8795A1"/>
@@ -10757,7 +10757,7 @@
               </a:rPr>
               <a:t>Handout §14.3     </a:t>
             </a:r>
-            <a:fld id="{E372ABB3-D7FA-4F6E-A2CC-D2A4F99322BD}" type="slidenum">
+            <a:fld id="{D9EBA804-25D3-4D94-9297-B6A81BA482D1}" type="slidenum">
               <a:rPr lang="en-GB" sz="1000">
                 <a:solidFill>
                   <a:srgbClr val="8795A1"/>
@@ -11096,7 +11096,7 @@
               </a:rPr>
               <a:t>§14.3  ·  Handout p. 89     </a:t>
             </a:r>
-            <a:fld id="{ED74AC3A-A205-4600-A1CC-3703684D0198}" type="slidenum">
+            <a:fld id="{A7163CDA-FFD5-448A-A644-8DC8BD9310D2}" type="slidenum">
               <a:rPr lang="en-GB" sz="1000">
                 <a:solidFill>
                   <a:srgbClr val="8795A1"/>
@@ -11552,7 +11552,7 @@
               </a:rPr>
               <a:t>§14.3  ·  Handout p. 89     </a:t>
             </a:r>
-            <a:fld id="{0498974F-3B2D-4D95-93F6-05154F99A3E1}" type="slidenum">
+            <a:fld id="{252BB1C5-CF35-415A-80D2-B9D1D22F25C7}" type="slidenum">
               <a:rPr lang="en-GB" sz="1000">
                 <a:solidFill>
                   <a:srgbClr val="8795A1"/>
@@ -12016,7 +12016,7 @@
               </a:rPr>
               <a:t>§14.3  ·  Handout p. 89     </a:t>
             </a:r>
-            <a:fld id="{91E21F5B-DA0D-4E57-B3CD-F267E239BB50}" type="slidenum">
+            <a:fld id="{70EA4768-0FD3-4E27-AC6E-ED37FA8665BA}" type="slidenum">
               <a:rPr lang="en-GB" sz="1000">
                 <a:solidFill>
                   <a:srgbClr val="8795A1"/>
@@ -12607,7 +12607,7 @@
               </a:rPr>
               <a:t>§14.3  ·  Handout p. 89     </a:t>
             </a:r>
-            <a:fld id="{CD2DC26B-4952-49FC-912E-C637C937167B}" type="slidenum">
+            <a:fld id="{545DD1D8-1D24-43F2-9C8C-AFDDA88C329C}" type="slidenum">
               <a:rPr lang="en-GB" sz="1000">
                 <a:solidFill>
                   <a:srgbClr val="8795A1"/>
@@ -13135,7 +13135,7 @@
               </a:rPr>
               <a:t>§14.4  ·  Handout p. 90     </a:t>
             </a:r>
-            <a:fld id="{F4F1ACA5-0BFB-4458-9C5C-33EECEE4361B}" type="slidenum">
+            <a:fld id="{72D2FEF3-AD5A-440C-A532-8940BB4BD334}" type="slidenum">
               <a:rPr lang="en-GB" sz="1000">
                 <a:solidFill>
                   <a:srgbClr val="8795A1"/>
@@ -14495,7 +14495,7 @@
               </a:rPr>
               <a:t>§14.4  ·  Handout p. 90     </a:t>
             </a:r>
-            <a:fld id="{3C83F85B-19B5-488E-A0B7-B19D5FB68F89}" type="slidenum">
+            <a:fld id="{4AE66EC0-0193-444C-BE55-15006D1384CD}" type="slidenum">
               <a:rPr lang="en-GB" sz="1000">
                 <a:solidFill>
                   <a:srgbClr val="8795A1"/>
@@ -16350,7 +16350,7 @@
               </a:rPr>
               <a:t>Handout p. 88     </a:t>
             </a:r>
-            <a:fld id="{3D0DD656-0350-4BC5-87FB-A37F631C3240}" type="slidenum">
+            <a:fld id="{105BB812-D9CB-4DBD-94A6-B02682190353}" type="slidenum">
               <a:rPr lang="en-GB" sz="1000">
                 <a:solidFill>
                   <a:srgbClr val="8795A1"/>
@@ -22002,7 +22002,7 @@
               </a:rPr>
               <a:t>Handout §14.5     </a:t>
             </a:r>
-            <a:fld id="{E83EB852-9FD9-4C85-9065-8B64BE98564C}" type="slidenum">
+            <a:fld id="{F72E7323-DCA4-4852-B62D-37D3BC4C0A04}" type="slidenum">
               <a:rPr lang="en-GB" sz="1000">
                 <a:solidFill>
                   <a:srgbClr val="8795A1"/>
@@ -22341,7 +22341,7 @@
               </a:rPr>
               <a:t>§14.5  ·  Handout p. 91     </a:t>
             </a:r>
-            <a:fld id="{CF4B3DDE-6936-49D9-9671-1E196E2FED82}" type="slidenum">
+            <a:fld id="{F4A54215-8367-4E12-879B-624F4AE5D48A}" type="slidenum">
               <a:rPr lang="en-GB" sz="1000">
                 <a:solidFill>
                   <a:srgbClr val="8795A1"/>
@@ -22878,7 +22878,7 @@
               </a:rPr>
               <a:t>§14.5  ·  Handout p. 91     </a:t>
             </a:r>
-            <a:fld id="{B62167E2-8490-454E-8EAB-24D916C1410D}" type="slidenum">
+            <a:fld id="{05E30A4C-1242-4F1B-8A9C-8E647ACC3133}" type="slidenum">
               <a:rPr lang="en-GB" sz="1000">
                 <a:solidFill>
                   <a:srgbClr val="8795A1"/>
@@ -23342,7 +23342,7 @@
               </a:rPr>
               <a:t>§14.5  ·  Handout p. 91     </a:t>
             </a:r>
-            <a:fld id="{5CA86636-D4CA-4842-8244-3FF3B8564378}" type="slidenum">
+            <a:fld id="{411706CD-056D-4278-B5AA-0165485F72C2}" type="slidenum">
               <a:rPr lang="en-GB" sz="1000">
                 <a:solidFill>
                   <a:srgbClr val="8795A1"/>
@@ -24449,7 +24449,7 @@
               </a:rPr>
               <a:t>§14.5  ·  Handout p. 91     </a:t>
             </a:r>
-            <a:fld id="{1114740D-80C1-46A2-88A4-6B2A76785DAC}" type="slidenum">
+            <a:fld id="{777E04B7-3A0F-4EDC-AEB5-017444A188BC}" type="slidenum">
               <a:rPr lang="en-GB" sz="1000">
                 <a:solidFill>
                   <a:srgbClr val="8795A1"/>
@@ -26214,7 +26214,7 @@
               </a:rPr>
               <a:t>Handout p. 94     </a:t>
             </a:r>
-            <a:fld id="{31C8541E-453A-4878-8F1F-F29FAC65DB30}" type="slidenum">
+            <a:fld id="{D8AAAD24-5A18-4778-8D71-3AB1E2C0A060}" type="slidenum">
               <a:rPr lang="en-GB" sz="1000">
                 <a:solidFill>
                   <a:srgbClr val="8795A1"/>
@@ -27727,7 +27727,7 @@
               </a:rPr>
               <a:t>Handout p. 94     </a:t>
             </a:r>
-            <a:fld id="{A2044324-F71D-49B9-9F7D-8CF232D885B1}" type="slidenum">
+            <a:fld id="{F412D11D-FDC4-4C3F-88FD-889CE2811387}" type="slidenum">
               <a:rPr lang="en-GB" sz="1000">
                 <a:solidFill>
                   <a:srgbClr val="8795A1"/>
@@ -29066,7 +29066,7 @@
               </a:rPr>
               <a:t>Handout p. 94     </a:t>
             </a:r>
-            <a:fld id="{A4D03715-D0FB-4DAE-863B-9CCCB497A465}" type="slidenum">
+            <a:fld id="{8C6B3E42-5419-4C15-95BC-CB5A8443C124}" type="slidenum">
               <a:rPr lang="en-GB" sz="1000">
                 <a:solidFill>
                   <a:srgbClr val="8795A1"/>
@@ -30432,7 +30432,7 @@
               </a:rPr>
               <a:t>Handout p. 94     </a:t>
             </a:r>
-            <a:fld id="{1CAB00CD-88A7-4452-8F46-7F3D0FFEB866}" type="slidenum">
+            <a:fld id="{BB211A43-94E4-4E53-9DB2-F6396F67F469}" type="slidenum">
               <a:rPr lang="en-GB" sz="1000">
                 <a:solidFill>
                   <a:srgbClr val="8795A1"/>
@@ -31771,7 +31771,7 @@
               </a:rPr>
               <a:t>Handout p. 94     </a:t>
             </a:r>
-            <a:fld id="{36528C69-7B30-43EA-B6D4-400C74899120}" type="slidenum">
+            <a:fld id="{8E5AB46D-0541-4926-BE02-2722F1ABB6AE}" type="slidenum">
               <a:rPr lang="en-GB" sz="1000">
                 <a:solidFill>
                   <a:srgbClr val="8795A1"/>
@@ -33128,7 +33128,7 @@
               </a:rPr>
               <a:t>Handout p. 88     </a:t>
             </a:r>
-            <a:fld id="{8059ADF1-4BE2-4BF9-913E-09C35B8531E5}" type="slidenum">
+            <a:fld id="{EB78887C-DA99-4921-A9EE-4DF370A9A17E}" type="slidenum">
               <a:rPr lang="en-GB" sz="1000">
                 <a:solidFill>
                   <a:srgbClr val="8795A1"/>
@@ -34929,7 +34929,7 @@
               </a:rPr>
               <a:t>§14.5  ·  Handout p. 91     </a:t>
             </a:r>
-            <a:fld id="{1D87622D-01B4-49FF-93BA-14056B1F736B}" type="slidenum">
+            <a:fld id="{B0999212-021E-478B-BE2C-ACBA21ECC72F}" type="slidenum">
               <a:rPr lang="en-GB" sz="1000">
                 <a:solidFill>
                   <a:srgbClr val="8795A1"/>
@@ -35351,7 +35351,7 @@
                 </a:solidFill>
                 <a:latin typeface="Segoe UI"/>
               </a:rPr>
-              <a:t>Week 9: Evaluate honestly; cost-based threshold</a:t>
+              <a:t>Week 8: Five classifiers; evaluate honestly</a:t>
             </a:r>
           </a:p>
         </p:txBody>
@@ -36213,7 +36213,7 @@
               </a:rPr>
               <a:t>§14.5  ·  Handout p. 91     </a:t>
             </a:r>
-            <a:fld id="{72026B2A-C8AD-4633-ACF6-8FF9AC7E8B70}" type="slidenum">
+            <a:fld id="{A9E4026B-AD01-47CF-90E8-B21F55DFE21E}" type="slidenum">
               <a:rPr lang="en-GB" sz="1000">
                 <a:solidFill>
                   <a:srgbClr val="8795A1"/>
@@ -37448,7 +37448,7 @@
               </a:rPr>
               <a:t>§14.5  ·  Handout p. 91     </a:t>
             </a:r>
-            <a:fld id="{E07DD6B9-D9B2-4BA0-85A1-77B410540CE6}" type="slidenum">
+            <a:fld id="{949A5F85-703A-49F6-9B4F-B3615988EB54}" type="slidenum">
               <a:rPr lang="en-GB" sz="1000">
                 <a:solidFill>
                   <a:srgbClr val="8795A1"/>
@@ -38497,7 +38497,7 @@
               </a:rPr>
               <a:t>§14.5  ·  Handout p. 91     </a:t>
             </a:r>
-            <a:fld id="{9C72CF9A-46AC-446C-8A97-9B0E7F3DE3AB}" type="slidenum">
+            <a:fld id="{94B9435B-06E3-4930-92E3-091A21468CE5}" type="slidenum">
               <a:rPr lang="en-GB" sz="1000">
                 <a:solidFill>
                   <a:srgbClr val="8795A1"/>
@@ -40226,7 +40226,7 @@
               </a:rPr>
               <a:t>§14.5  ·  Handout p. 91     </a:t>
             </a:r>
-            <a:fld id="{609EE230-A6FC-4056-B19E-C5E63EE703AF}" type="slidenum">
+            <a:fld id="{F2924064-01DF-47F1-A7C2-A0BFBA173479}" type="slidenum">
               <a:rPr lang="en-GB" sz="1000">
                 <a:solidFill>
                   <a:srgbClr val="8795A1"/>
@@ -41328,7 +41328,7 @@
               </a:rPr>
               <a:t>§14.5  ·  Handout p. 91     </a:t>
             </a:r>
-            <a:fld id="{876F04D0-867E-416F-B32A-8ABF207EF4C1}" type="slidenum">
+            <a:fld id="{64DBF0BB-139A-4186-B952-4452F349769B}" type="slidenum">
               <a:rPr lang="en-GB" sz="1000">
                 <a:solidFill>
                   <a:srgbClr val="8795A1"/>
@@ -43602,7 +43602,7 @@
               </a:rPr>
               <a:t>§14.5  ·  Handout p. 91     </a:t>
             </a:r>
-            <a:fld id="{FA915386-21EC-4EE5-AFAB-18980A8E8E90}" type="slidenum">
+            <a:fld id="{0DCAE76F-E734-4A1D-91CD-A9A74FFE132F}" type="slidenum">
               <a:rPr lang="en-GB" sz="1000">
                 <a:solidFill>
                   <a:srgbClr val="8795A1"/>
@@ -45125,7 +45125,7 @@
               </a:rPr>
               <a:t>Handout p. 94  ·  answers in Appendix D     </a:t>
             </a:r>
-            <a:fld id="{82FF11DB-51C2-4A85-8091-5C918299AEFF}" type="slidenum">
+            <a:fld id="{76691341-A92A-4D40-86E2-DC54EE1BC2AD}" type="slidenum">
               <a:rPr lang="en-GB" sz="1000">
                 <a:solidFill>
                   <a:srgbClr val="D5DEE5"/>
@@ -45477,7 +45477,7 @@
               </a:rPr>
               <a:t>Handout p. 94  ·  answers in Appendix D     </a:t>
             </a:r>
-            <a:fld id="{16937046-7614-46CF-8FFA-2CE9C9124185}" type="slidenum">
+            <a:fld id="{9FC0D23D-9360-49E6-BE02-ABBE23832027}" type="slidenum">
               <a:rPr lang="en-GB" sz="1000">
                 <a:solidFill>
                   <a:srgbClr val="8795A1"/>
@@ -45869,7 +45869,7 @@
               </a:rPr>
               <a:t>Handout p. 94  ·  answers in Appendix D     </a:t>
             </a:r>
-            <a:fld id="{D433D120-2B75-4C26-B856-D28EFF83D246}" type="slidenum">
+            <a:fld id="{B629E008-AA83-44E5-8E0E-B3CB6C2877E9}" type="slidenum">
               <a:rPr lang="en-GB" sz="1000">
                 <a:solidFill>
                   <a:srgbClr val="D5DEE5"/>
@@ -46108,7 +46108,7 @@
               </a:rPr>
               <a:t>Handout p. 88     </a:t>
             </a:r>
-            <a:fld id="{511A2025-0477-435C-A3F4-C9AFA741DBC6}" type="slidenum">
+            <a:fld id="{08D8AF2E-D823-4BF0-A230-A821087C17BC}" type="slidenum">
               <a:rPr lang="en-GB" sz="1000">
                 <a:solidFill>
                   <a:srgbClr val="8795A1"/>
@@ -48681,7 +48681,7 @@
               </a:rPr>
               <a:t>Handout p. 94  ·  answers in Appendix D     </a:t>
             </a:r>
-            <a:fld id="{C0820500-2B95-4700-A77B-D84D8FBD1D0C}" type="slidenum">
+            <a:fld id="{BDCEBAE8-9D3B-44E8-A013-47A675FEE65E}" type="slidenum">
               <a:rPr lang="en-GB" sz="1000">
                 <a:solidFill>
                   <a:srgbClr val="8795A1"/>
@@ -49073,7 +49073,7 @@
               </a:rPr>
               <a:t>Handout p. 94  ·  answers in Appendix D     </a:t>
             </a:r>
-            <a:fld id="{F16DE609-303D-40CF-9F6D-76D63A9FCC46}" type="slidenum">
+            <a:fld id="{39454A3E-AEEB-4E20-8204-CC3244CC443B}" type="slidenum">
               <a:rPr lang="en-GB" sz="1000">
                 <a:solidFill>
                   <a:srgbClr val="D5DEE5"/>
@@ -49407,7 +49407,7 @@
               </a:rPr>
               <a:t>Handout p. 94  ·  answers in Appendix D     </a:t>
             </a:r>
-            <a:fld id="{32263875-9101-481C-80CD-97477A27815A}" type="slidenum">
+            <a:fld id="{3B053AAA-5AAB-4D1D-A495-C973626B769D}" type="slidenum">
               <a:rPr lang="en-GB" sz="1000">
                 <a:solidFill>
                   <a:srgbClr val="8795A1"/>
@@ -49746,7 +49746,7 @@
               </a:rPr>
               <a:t>Handout p. 94     </a:t>
             </a:r>
-            <a:fld id="{57BCC18E-1FBD-4FF3-AE7B-3A0398E8A50E}" type="slidenum">
+            <a:fld id="{93216456-567D-4652-A097-9696357A68F0}" type="slidenum">
               <a:rPr lang="en-GB" sz="1000">
                 <a:solidFill>
                   <a:srgbClr val="8795A1"/>
@@ -51705,7 +51705,7 @@
               </a:rPr>
               <a:t>Handout p. 94     </a:t>
             </a:r>
-            <a:fld id="{AEC7FD47-A073-463B-8A23-524AF3766CA5}" type="slidenum">
+            <a:fld id="{7432F045-D8A4-46A2-A7D5-EF0FF82B73B0}" type="slidenum">
               <a:rPr lang="en-GB" sz="1000">
                 <a:solidFill>
                   <a:srgbClr val="8795A1"/>
@@ -52873,7 +52873,7 @@
               </a:rPr>
               <a:t>Handout p. 94     </a:t>
             </a:r>
-            <a:fld id="{F8CBF110-7953-42C6-ADA7-5A2D785F1CFB}" type="slidenum">
+            <a:fld id="{BB179E98-E1E2-4C97-8EC0-41B4F49ABBA8}" type="slidenum">
               <a:rPr lang="en-GB" sz="1000">
                 <a:solidFill>
                   <a:srgbClr val="8795A1"/>
@@ -54041,7 +54041,7 @@
               </a:rPr>
               <a:t>Handout p. 94     </a:t>
             </a:r>
-            <a:fld id="{1DFC8425-06F8-4687-A8BA-D208E292D023}" type="slidenum">
+            <a:fld id="{79583B72-5466-43E2-A74A-4263E53BC687}" type="slidenum">
               <a:rPr lang="en-GB" sz="1000">
                 <a:solidFill>
                   <a:srgbClr val="8795A1"/>
@@ -55483,13 +55483,13 @@
               </a:spcAft>
             </a:pPr>
             <a:r>
-              <a:rPr sz="2000" b="0" i="0">
+              <a:rPr sz="2100" b="0" i="0">
                 <a:solidFill>
                   <a:srgbClr val="FFFFFF"/>
                 </a:solidFill>
                 <a:latin typeface="Segoe UI Semibold"/>
               </a:rPr>
-              <a:t>Evaluate honestly; cost-based threshold</a:t>
+              <a:t>Five classifiers; evaluate honestly</a:t>
             </a:r>
           </a:p>
         </p:txBody>
@@ -55562,7 +55562,7 @@
           <a:lstStyle/>
           <a:p>
             <a:pPr algn="r"/>
-            <a:fld id="{00820FF0-7099-4DF6-A5ED-51623CFF6150}" type="slidenum">
+            <a:fld id="{8373F05C-4F26-4A5E-A1AF-A67D22A00F52}" type="slidenum">
               <a:rPr lang="en-GB" sz="1000">
                 <a:solidFill>
                   <a:srgbClr val="D5DEE5"/>
@@ -55801,7 +55801,7 @@
               </a:rPr>
               <a:t>Handout pp. 88–94     </a:t>
             </a:r>
-            <a:fld id="{0C165A3E-E681-4A67-87C0-D4BAAE209EDD}" type="slidenum">
+            <a:fld id="{16D22603-CD76-49FF-8688-BE986C16B03E}" type="slidenum">
               <a:rPr lang="en-GB" sz="1000">
                 <a:solidFill>
                   <a:srgbClr val="8795A1"/>
@@ -57305,7 +57305,7 @@
               </a:rPr>
               <a:t>§14.1  ·  Handout p. 88     </a:t>
             </a:r>
-            <a:fld id="{E1531F89-32C8-4949-A16C-F085FFD93E25}" type="slidenum">
+            <a:fld id="{368EE8FA-840E-4E94-BE23-FF6B31875B95}" type="slidenum">
               <a:rPr lang="en-GB" sz="1000">
                 <a:solidFill>
                   <a:srgbClr val="8795A1"/>
@@ -58023,7 +58023,7 @@
               </a:rPr>
               <a:t>Handout §14.2     </a:t>
             </a:r>
-            <a:fld id="{AE26B4CF-F17C-4EA6-82A4-3F14698F419F}" type="slidenum">
+            <a:fld id="{8591D36E-5C75-4E86-8422-F3F800AE4EB8}" type="slidenum">
               <a:rPr lang="en-GB" sz="1000">
                 <a:solidFill>
                   <a:srgbClr val="8795A1"/>
@@ -58362,7 +58362,7 @@
               </a:rPr>
               <a:t>§14.2  ·  Handout p. 88     </a:t>
             </a:r>
-            <a:fld id="{17199E2A-FEF6-483F-8485-F41B801F7840}" type="slidenum">
+            <a:fld id="{B4A965D6-90DF-4267-97FA-9BCC0190B429}" type="slidenum">
               <a:rPr lang="en-GB" sz="1000">
                 <a:solidFill>
                   <a:srgbClr val="8795A1"/>
@@ -58890,7 +58890,7 @@
               </a:rPr>
               <a:t>§14.2  ·  Handout p. 88     </a:t>
             </a:r>
-            <a:fld id="{92C0E221-0441-4996-9BC5-B32971E74E54}" type="slidenum">
+            <a:fld id="{498C89C2-161C-4A5F-A24D-1FE738E575B9}" type="slidenum">
               <a:rPr lang="en-GB" sz="1000">
                 <a:solidFill>
                   <a:srgbClr val="8795A1"/>
